--- a/問題集/問11-15.pptx
+++ b/問題集/問11-15.pptx
@@ -109,7 +109,124 @@
       </a:defRPr>
     </a:lvl9pPr>
   </p:defaultTextStyle>
+  <p:extLst>
+    <p:ext uri="{EFAFB233-063F-42B5-8137-9DF3F51BA10A}">
+      <p15:sldGuideLst xmlns:p15="http://schemas.microsoft.com/office/powerpoint/2012/main"/>
+    </p:ext>
+  </p:extLst>
 </p:presentation>
+</file>
+
+<file path=ppt/changesInfos/changesInfo1.xml><?xml version="1.0" encoding="utf-8"?>
+<pc:chgInfo xmlns:a="http://schemas.openxmlformats.org/drawingml/2006/main" xmlns:r="http://schemas.openxmlformats.org/officeDocument/2006/relationships" xmlns:ac="http://schemas.microsoft.com/office/drawing/2013/main/command" xmlns:pc="http://schemas.microsoft.com/office/powerpoint/2013/main/command">
+  <pc:docChgLst>
+    <pc:chgData name="越智 統" userId="2de33d77-a65a-42d1-92e2-b40da65bb07e" providerId="ADAL" clId="{95693629-560E-446D-BA1C-C8ACF68AD747}"/>
+    <pc:docChg chg="modSld">
+      <pc:chgData name="越智 統" userId="2de33d77-a65a-42d1-92e2-b40da65bb07e" providerId="ADAL" clId="{95693629-560E-446D-BA1C-C8ACF68AD747}" dt="2026-10-15T02:23:04.531" v="363" actId="20577"/>
+      <pc:docMkLst>
+        <pc:docMk/>
+      </pc:docMkLst>
+      <pc:sldChg chg="modSp mod">
+        <pc:chgData name="越智 統" userId="2de33d77-a65a-42d1-92e2-b40da65bb07e" providerId="ADAL" clId="{95693629-560E-446D-BA1C-C8ACF68AD747}" dt="2026-10-15T02:14:45.869" v="4" actId="20577"/>
+        <pc:sldMkLst>
+          <pc:docMk/>
+          <pc:sldMk cId="2389009565" sldId="256"/>
+        </pc:sldMkLst>
+        <pc:spChg chg="mod">
+          <ac:chgData name="越智 統" userId="2de33d77-a65a-42d1-92e2-b40da65bb07e" providerId="ADAL" clId="{95693629-560E-446D-BA1C-C8ACF68AD747}" dt="2026-10-15T02:14:45.869" v="4" actId="20577"/>
+          <ac:spMkLst>
+            <pc:docMk/>
+            <pc:sldMk cId="2389009565" sldId="256"/>
+            <ac:spMk id="2" creationId="{85DB12E6-B9AD-6632-F0AC-68DB3B92E365}"/>
+          </ac:spMkLst>
+        </pc:spChg>
+      </pc:sldChg>
+      <pc:sldChg chg="modSp mod">
+        <pc:chgData name="越智 統" userId="2de33d77-a65a-42d1-92e2-b40da65bb07e" providerId="ADAL" clId="{95693629-560E-446D-BA1C-C8ACF68AD747}" dt="2026-10-15T02:17:30.940" v="80" actId="20577"/>
+        <pc:sldMkLst>
+          <pc:docMk/>
+          <pc:sldMk cId="2822825209" sldId="257"/>
+        </pc:sldMkLst>
+        <pc:spChg chg="mod">
+          <ac:chgData name="越智 統" userId="2de33d77-a65a-42d1-92e2-b40da65bb07e" providerId="ADAL" clId="{95693629-560E-446D-BA1C-C8ACF68AD747}" dt="2026-10-15T02:17:30.940" v="80" actId="20577"/>
+          <ac:spMkLst>
+            <pc:docMk/>
+            <pc:sldMk cId="2822825209" sldId="257"/>
+            <ac:spMk id="2" creationId="{FF9F9DA1-6EBB-42A0-C441-F3A739B87F6C}"/>
+          </ac:spMkLst>
+        </pc:spChg>
+      </pc:sldChg>
+      <pc:sldChg chg="modSp mod">
+        <pc:chgData name="越智 統" userId="2de33d77-a65a-42d1-92e2-b40da65bb07e" providerId="ADAL" clId="{95693629-560E-446D-BA1C-C8ACF68AD747}" dt="2026-10-15T02:17:57.037" v="103" actId="20577"/>
+        <pc:sldMkLst>
+          <pc:docMk/>
+          <pc:sldMk cId="2656132272" sldId="258"/>
+        </pc:sldMkLst>
+        <pc:spChg chg="mod">
+          <ac:chgData name="越智 統" userId="2de33d77-a65a-42d1-92e2-b40da65bb07e" providerId="ADAL" clId="{95693629-560E-446D-BA1C-C8ACF68AD747}" dt="2026-10-15T02:17:57.037" v="103" actId="20577"/>
+          <ac:spMkLst>
+            <pc:docMk/>
+            <pc:sldMk cId="2656132272" sldId="258"/>
+            <ac:spMk id="2" creationId="{58D0F7C8-F1E0-2B1E-7EAE-A44B5388CB0A}"/>
+          </ac:spMkLst>
+        </pc:spChg>
+      </pc:sldChg>
+      <pc:sldChg chg="modSp mod">
+        <pc:chgData name="越智 統" userId="2de33d77-a65a-42d1-92e2-b40da65bb07e" providerId="ADAL" clId="{95693629-560E-446D-BA1C-C8ACF68AD747}" dt="2026-10-15T02:19:13.438" v="149" actId="20577"/>
+        <pc:sldMkLst>
+          <pc:docMk/>
+          <pc:sldMk cId="1735466616" sldId="259"/>
+        </pc:sldMkLst>
+        <pc:spChg chg="mod">
+          <ac:chgData name="越智 統" userId="2de33d77-a65a-42d1-92e2-b40da65bb07e" providerId="ADAL" clId="{95693629-560E-446D-BA1C-C8ACF68AD747}" dt="2026-10-15T02:19:13.438" v="149" actId="20577"/>
+          <ac:spMkLst>
+            <pc:docMk/>
+            <pc:sldMk cId="1735466616" sldId="259"/>
+            <ac:spMk id="2" creationId="{A82BBB57-4F70-7BD2-5273-4CE5C45E6BC6}"/>
+          </ac:spMkLst>
+        </pc:spChg>
+      </pc:sldChg>
+      <pc:sldChg chg="modSp mod">
+        <pc:chgData name="越智 統" userId="2de33d77-a65a-42d1-92e2-b40da65bb07e" providerId="ADAL" clId="{95693629-560E-446D-BA1C-C8ACF68AD747}" dt="2026-10-15T02:22:32.133" v="336" actId="20577"/>
+        <pc:sldMkLst>
+          <pc:docMk/>
+          <pc:sldMk cId="3813827065" sldId="260"/>
+        </pc:sldMkLst>
+        <pc:spChg chg="mod">
+          <ac:chgData name="越智 統" userId="2de33d77-a65a-42d1-92e2-b40da65bb07e" providerId="ADAL" clId="{95693629-560E-446D-BA1C-C8ACF68AD747}" dt="2026-10-15T02:22:32.133" v="336" actId="20577"/>
+          <ac:spMkLst>
+            <pc:docMk/>
+            <pc:sldMk cId="3813827065" sldId="260"/>
+            <ac:spMk id="2" creationId="{D4EF1652-2796-9CF3-E084-63B6015FEB89}"/>
+          </ac:spMkLst>
+        </pc:spChg>
+      </pc:sldChg>
+      <pc:sldChg chg="modSp mod">
+        <pc:chgData name="越智 統" userId="2de33d77-a65a-42d1-92e2-b40da65bb07e" providerId="ADAL" clId="{95693629-560E-446D-BA1C-C8ACF68AD747}" dt="2026-10-15T02:23:04.531" v="363" actId="20577"/>
+        <pc:sldMkLst>
+          <pc:docMk/>
+          <pc:sldMk cId="2186556264" sldId="261"/>
+        </pc:sldMkLst>
+        <pc:spChg chg="mod">
+          <ac:chgData name="越智 統" userId="2de33d77-a65a-42d1-92e2-b40da65bb07e" providerId="ADAL" clId="{95693629-560E-446D-BA1C-C8ACF68AD747}" dt="2026-10-15T02:22:59.690" v="361" actId="20577"/>
+          <ac:spMkLst>
+            <pc:docMk/>
+            <pc:sldMk cId="2186556264" sldId="261"/>
+            <ac:spMk id="2" creationId="{C4D86C47-EC53-353C-B65F-3EABD6FDEA30}"/>
+          </ac:spMkLst>
+        </pc:spChg>
+        <pc:spChg chg="mod">
+          <ac:chgData name="越智 統" userId="2de33d77-a65a-42d1-92e2-b40da65bb07e" providerId="ADAL" clId="{95693629-560E-446D-BA1C-C8ACF68AD747}" dt="2026-10-15T02:23:04.531" v="363" actId="20577"/>
+          <ac:spMkLst>
+            <pc:docMk/>
+            <pc:sldMk cId="2186556264" sldId="261"/>
+            <ac:spMk id="3" creationId="{8267DD35-CE7E-B061-8724-95F37CFD71B9}"/>
+          </ac:spMkLst>
+        </pc:spChg>
+      </pc:sldChg>
+    </pc:docChg>
+  </pc:docChgLst>
+</pc:chgInfo>
 </file>
 
 <file path=ppt/slideLayouts/slideLayout1.xml><?xml version="1.0" encoding="utf-8"?>
@@ -259,7 +376,7 @@
           <a:p>
             <a:fld id="{E9041073-9128-4436-8470-4747F5ACBCBC}" type="datetimeFigureOut">
               <a:rPr kumimoji="1" lang="ja-JP" altLang="en-US" smtClean="0"/>
-              <a:t>2026/9/15</a:t>
+              <a:t>2026/10/15</a:t>
             </a:fld>
             <a:endParaRPr kumimoji="1" lang="ja-JP" altLang="en-US"/>
           </a:p>
@@ -489,7 +606,7 @@
           <a:p>
             <a:fld id="{E9041073-9128-4436-8470-4747F5ACBCBC}" type="datetimeFigureOut">
               <a:rPr kumimoji="1" lang="ja-JP" altLang="en-US" smtClean="0"/>
-              <a:t>2026/9/15</a:t>
+              <a:t>2026/10/15</a:t>
             </a:fld>
             <a:endParaRPr kumimoji="1" lang="ja-JP" altLang="en-US"/>
           </a:p>
@@ -729,7 +846,7 @@
           <a:p>
             <a:fld id="{E9041073-9128-4436-8470-4747F5ACBCBC}" type="datetimeFigureOut">
               <a:rPr kumimoji="1" lang="ja-JP" altLang="en-US" smtClean="0"/>
-              <a:t>2026/9/15</a:t>
+              <a:t>2026/10/15</a:t>
             </a:fld>
             <a:endParaRPr kumimoji="1" lang="ja-JP" altLang="en-US"/>
           </a:p>
@@ -959,7 +1076,7 @@
           <a:p>
             <a:fld id="{E9041073-9128-4436-8470-4747F5ACBCBC}" type="datetimeFigureOut">
               <a:rPr kumimoji="1" lang="ja-JP" altLang="en-US" smtClean="0"/>
-              <a:t>2026/9/15</a:t>
+              <a:t>2026/10/15</a:t>
             </a:fld>
             <a:endParaRPr kumimoji="1" lang="ja-JP" altLang="en-US"/>
           </a:p>
@@ -1234,7 +1351,7 @@
           <a:p>
             <a:fld id="{E9041073-9128-4436-8470-4747F5ACBCBC}" type="datetimeFigureOut">
               <a:rPr kumimoji="1" lang="ja-JP" altLang="en-US" smtClean="0"/>
-              <a:t>2026/9/15</a:t>
+              <a:t>2026/10/15</a:t>
             </a:fld>
             <a:endParaRPr kumimoji="1" lang="ja-JP" altLang="en-US"/>
           </a:p>
@@ -1563,7 +1680,7 @@
           <a:p>
             <a:fld id="{E9041073-9128-4436-8470-4747F5ACBCBC}" type="datetimeFigureOut">
               <a:rPr kumimoji="1" lang="ja-JP" altLang="en-US" smtClean="0"/>
-              <a:t>2026/9/15</a:t>
+              <a:t>2026/10/15</a:t>
             </a:fld>
             <a:endParaRPr kumimoji="1" lang="ja-JP" altLang="en-US"/>
           </a:p>
@@ -2039,7 +2156,7 @@
           <a:p>
             <a:fld id="{E9041073-9128-4436-8470-4747F5ACBCBC}" type="datetimeFigureOut">
               <a:rPr kumimoji="1" lang="ja-JP" altLang="en-US" smtClean="0"/>
-              <a:t>2026/9/15</a:t>
+              <a:t>2026/10/15</a:t>
             </a:fld>
             <a:endParaRPr kumimoji="1" lang="ja-JP" altLang="en-US"/>
           </a:p>
@@ -2180,7 +2297,7 @@
           <a:p>
             <a:fld id="{E9041073-9128-4436-8470-4747F5ACBCBC}" type="datetimeFigureOut">
               <a:rPr kumimoji="1" lang="ja-JP" altLang="en-US" smtClean="0"/>
-              <a:t>2026/9/15</a:t>
+              <a:t>2026/10/15</a:t>
             </a:fld>
             <a:endParaRPr kumimoji="1" lang="ja-JP" altLang="en-US"/>
           </a:p>
@@ -2293,7 +2410,7 @@
           <a:p>
             <a:fld id="{E9041073-9128-4436-8470-4747F5ACBCBC}" type="datetimeFigureOut">
               <a:rPr kumimoji="1" lang="ja-JP" altLang="en-US" smtClean="0"/>
-              <a:t>2026/9/15</a:t>
+              <a:t>2026/10/15</a:t>
             </a:fld>
             <a:endParaRPr kumimoji="1" lang="ja-JP" altLang="en-US"/>
           </a:p>
@@ -2636,7 +2753,7 @@
           <a:p>
             <a:fld id="{E9041073-9128-4436-8470-4747F5ACBCBC}" type="datetimeFigureOut">
               <a:rPr kumimoji="1" lang="ja-JP" altLang="en-US" smtClean="0"/>
-              <a:t>2026/9/15</a:t>
+              <a:t>2026/10/15</a:t>
             </a:fld>
             <a:endParaRPr kumimoji="1" lang="ja-JP" altLang="en-US"/>
           </a:p>
@@ -2924,7 +3041,7 @@
           <a:p>
             <a:fld id="{E9041073-9128-4436-8470-4747F5ACBCBC}" type="datetimeFigureOut">
               <a:rPr kumimoji="1" lang="ja-JP" altLang="en-US" smtClean="0"/>
-              <a:t>2026/9/15</a:t>
+              <a:t>2026/10/15</a:t>
             </a:fld>
             <a:endParaRPr kumimoji="1" lang="ja-JP" altLang="en-US"/>
           </a:p>
@@ -3197,7 +3314,7 @@
           <a:p>
             <a:fld id="{E9041073-9128-4436-8470-4747F5ACBCBC}" type="datetimeFigureOut">
               <a:rPr kumimoji="1" lang="ja-JP" altLang="en-US" smtClean="0"/>
-              <a:t>2026/9/15</a:t>
+              <a:t>2026/10/15</a:t>
             </a:fld>
             <a:endParaRPr kumimoji="1" lang="ja-JP" altLang="en-US"/>
           </a:p>
@@ -3635,7 +3752,15 @@
           <a:bodyPr/>
           <a:lstStyle/>
           <a:p>
-            <a:endParaRPr kumimoji="1" lang="ja-JP" altLang="en-US"/>
+            <a:r>
+              <a:rPr lang="en-US" altLang="ja-JP" dirty="0"/>
+              <a:t>1</a:t>
+            </a:r>
+            <a:r>
+              <a:rPr kumimoji="1" lang="en-US" altLang="ja-JP" dirty="0"/>
+              <a:t>1-15</a:t>
+            </a:r>
+            <a:endParaRPr kumimoji="1" lang="ja-JP" altLang="en-US" dirty="0"/>
           </a:p>
         </p:txBody>
       </p:sp>
@@ -3660,7 +3785,7 @@
           <a:bodyPr/>
           <a:lstStyle/>
           <a:p>
-            <a:endParaRPr kumimoji="1" lang="ja-JP" altLang="en-US"/>
+            <a:endParaRPr kumimoji="1" lang="ja-JP" altLang="en-US" dirty="0"/>
           </a:p>
         </p:txBody>
       </p:sp>
@@ -3716,8 +3841,20 @@
           <a:lstStyle/>
           <a:p>
             <a:r>
+              <a:rPr kumimoji="1" lang="ja-JP" altLang="en-US" dirty="0"/>
+              <a:t>問</a:t>
+            </a:r>
+            <a:r>
               <a:rPr kumimoji="1" lang="en-US" altLang="ja-JP" dirty="0"/>
-              <a:t>11</a:t>
+              <a:t>1</a:t>
+            </a:r>
+            <a:r>
+              <a:rPr lang="en-US" altLang="ja-JP" dirty="0"/>
+              <a:t>1: </a:t>
+            </a:r>
+            <a:r>
+              <a:rPr lang="ja-JP" altLang="en-US" dirty="0"/>
+              <a:t>数値を配列で表現する</a:t>
             </a:r>
             <a:endParaRPr kumimoji="1" lang="ja-JP" altLang="en-US" dirty="0"/>
           </a:p>
@@ -3909,10 +4046,17 @@
           <a:lstStyle/>
           <a:p>
             <a:r>
+              <a:rPr kumimoji="1" lang="ja-JP" altLang="en-US" dirty="0"/>
+              <a:t>問</a:t>
+            </a:r>
+            <a:r>
               <a:rPr kumimoji="1" lang="en-US" altLang="ja-JP" dirty="0"/>
-              <a:t>12</a:t>
-            </a:r>
-            <a:endParaRPr kumimoji="1" lang="ja-JP" altLang="en-US" dirty="0"/>
+              <a:t>12: bit</a:t>
+            </a:r>
+            <a:r>
+              <a:rPr kumimoji="1" lang="ja-JP" altLang="en-US" dirty="0"/>
+              <a:t>演算</a:t>
+            </a:r>
           </a:p>
         </p:txBody>
       </p:sp>
@@ -4078,10 +4222,25 @@
           <a:lstStyle/>
           <a:p>
             <a:r>
+              <a:rPr kumimoji="1" lang="ja-JP" altLang="en-US" dirty="0"/>
+              <a:t>問</a:t>
+            </a:r>
+            <a:r>
               <a:rPr kumimoji="1" lang="en-US" altLang="ja-JP" dirty="0"/>
-              <a:t>13</a:t>
-            </a:r>
-            <a:endParaRPr kumimoji="1" lang="ja-JP" altLang="en-US" dirty="0"/>
+              <a:t>13: 2</a:t>
+            </a:r>
+            <a:r>
+              <a:rPr kumimoji="1" lang="ja-JP" altLang="en-US" dirty="0"/>
+              <a:t>進数と</a:t>
+            </a:r>
+            <a:r>
+              <a:rPr kumimoji="1" lang="en-US" altLang="ja-JP" dirty="0"/>
+              <a:t>10</a:t>
+            </a:r>
+            <a:r>
+              <a:rPr kumimoji="1" lang="ja-JP" altLang="en-US" dirty="0"/>
+              <a:t>進数の変換</a:t>
+            </a:r>
           </a:p>
         </p:txBody>
       </p:sp>
@@ -4264,8 +4423,16 @@
           <a:lstStyle/>
           <a:p>
             <a:r>
+              <a:rPr kumimoji="1" lang="ja-JP" altLang="en-US" dirty="0"/>
+              <a:t>問</a:t>
+            </a:r>
+            <a:r>
               <a:rPr kumimoji="1" lang="en-US" altLang="ja-JP" dirty="0"/>
-              <a:t>14</a:t>
+              <a:t>14: </a:t>
+            </a:r>
+            <a:r>
+              <a:rPr lang="ja-JP" altLang="en-US" dirty="0"/>
+              <a:t>プログラムの目的を見つける</a:t>
             </a:r>
             <a:endParaRPr kumimoji="1" lang="ja-JP" altLang="en-US" dirty="0"/>
           </a:p>
@@ -4481,10 +4648,17 @@
           <a:lstStyle/>
           <a:p>
             <a:r>
+              <a:rPr kumimoji="1" lang="ja-JP" altLang="en-US" dirty="0"/>
+              <a:t>問</a:t>
+            </a:r>
+            <a:r>
               <a:rPr kumimoji="1" lang="en-US" altLang="ja-JP" dirty="0"/>
-              <a:t>15</a:t>
-            </a:r>
-            <a:endParaRPr kumimoji="1" lang="ja-JP" altLang="en-US" dirty="0"/>
+              <a:t>15: </a:t>
+            </a:r>
+            <a:r>
+              <a:rPr kumimoji="1" lang="ja-JP" altLang="en-US" dirty="0"/>
+              <a:t>チェック・ディジット</a:t>
+            </a:r>
           </a:p>
         </p:txBody>
       </p:sp>
@@ -4518,8 +4692,12 @@
               <a:t>: </a:t>
             </a:r>
             <a:r>
+              <a:rPr kumimoji="1" lang="ja-JP" altLang="en-US"/>
+              <a:t>チェック・ディジット</a:t>
+            </a:r>
+            <a:r>
               <a:rPr kumimoji="1" lang="ja-JP" altLang="en-US" dirty="0"/>
-              <a:t>チェックディジットの追加</a:t>
+              <a:t>の追加</a:t>
             </a:r>
             <a:endParaRPr kumimoji="1" lang="en-US" altLang="ja-JP" dirty="0"/>
           </a:p>
